--- a/PPTs/Ch12_13_Fixed_Floating_Point_Numbers Exercises ANS.pptx
+++ b/PPTs/Ch12_13_Fixed_Floating_Point_Numbers Exercises ANS.pptx
@@ -4807,7 +4807,7 @@
           <a:p>
             <a:r>
               <a:rPr lang="en-US" dirty="0"/>
-              <a:t>Fall 2025</a:t>
+              <a:t>Fall 2026</a:t>
             </a:r>
           </a:p>
         </p:txBody>
@@ -7282,7 +7282,7 @@
                       <a:rPr lang="en-US" sz="2800" i="1">
                         <a:latin typeface="Cambria Math" panose="02040503050406030204" pitchFamily="18" charset="0"/>
                       </a:rPr>
-                      <m:t>.9271249771118164</m:t>
+                      <m:t>.9290000200271606</m:t>
                     </m:r>
                   </m:oMath>
                 </a14:m>
@@ -7494,7 +7494,7 @@
                             <a:rPr lang="en-US" sz="2800" i="1">
                               <a:latin typeface="Cambria Math" panose="02040503050406030204" pitchFamily="18" charset="0"/>
                             </a:rPr>
-                            <m:t>+0.9271249771118164</m:t>
+                            <m:t>+0.9290000200271606</m:t>
                           </m:r>
                         </m:e>
                       </m:d>
@@ -7562,7 +7562,7 @@
                         <a:rPr lang="en-US" sz="2800" i="1">
                           <a:latin typeface="Cambria Math" panose="02040503050406030204" pitchFamily="18" charset="0"/>
                         </a:rPr>
-                        <m:t>.9271249771118164</m:t>
+                        <m:t>.9290000200271606</m:t>
                       </m:r>
                       <m:r>
                         <a:rPr lang="en-US" sz="2800" i="1">
@@ -7940,7 +7940,7 @@
               <a:p>
                 <a:r>
                   <a:rPr lang="en-US" sz="2800" dirty="0"/>
-                  <a:t>Fraction = 2^-3 + 2^-7 </a:t>
+                  <a:t xml:space="preserve">Fraction = 2^-4 + 2^-8 </a:t>
                 </a:r>
                 <a14:m>
                   <m:oMath xmlns:m="http://schemas.openxmlformats.org/officeDocument/2006/math">
@@ -7948,25 +7948,25 @@
                       <a:rPr lang="en-US" sz="2800" i="1">
                         <a:latin typeface="Cambria Math" panose="02040503050406030204" pitchFamily="18" charset="0"/>
                       </a:rPr>
-                      <m:t>=</m:t>
+                      <m:t>=0.06640625</m:t>
                     </m:r>
                     <m:r>
                       <a:rPr lang="en-US" sz="2800" i="1">
                         <a:latin typeface="Cambria Math" panose="02040503050406030204" pitchFamily="18" charset="0"/>
                       </a:rPr>
-                      <m:t>0</m:t>
+                      <m:t/>
                     </m:r>
                     <m:r>
                       <a:rPr lang="en-US" sz="2800" i="1">
                         <a:latin typeface="Cambria Math" panose="02040503050406030204" pitchFamily="18" charset="0"/>
                       </a:rPr>
-                      <m:t>.</m:t>
+                      <m:t/>
                     </m:r>
                     <m:r>
                       <a:rPr lang="en-US" sz="2800" i="1">
                         <a:latin typeface="Cambria Math" panose="02040503050406030204" pitchFamily="18" charset="0"/>
                       </a:rPr>
-                      <m:t>1328125</m:t>
+                      <m:t/>
                     </m:r>
                   </m:oMath>
                 </a14:m>
